--- a/docs/연구_흐름도.pptx
+++ b/docs/연구_흐름도.pptx
@@ -1532,7 +1532,7 @@
                 <a:ea typeface="Calibri" pitchFamily="34" charset="-122"/>
                 <a:cs typeface="Calibri" pitchFamily="34" charset="-120"/>
               </a:rPr>
-              <a:t>미검율</a:t>
+              <a:t>미검율 (무섭동)</a:t>
             </a:r>
             <a:endParaRPr lang="en-US" sz="1100" dirty="0"/>
           </a:p>
@@ -1649,7 +1649,7 @@
                 <a:ea typeface="Cambria" pitchFamily="34" charset="-122"/>
                 <a:cs typeface="Cambria" pitchFamily="34" charset="-120"/>
               </a:rPr>
-              <a:t>27 ms</a:t>
+              <a:t>18.8 ms</a:t>
             </a:r>
             <a:endParaRPr lang="en-US" sz="2800" dirty="0"/>
           </a:p>
@@ -1688,7 +1688,7 @@
                 <a:ea typeface="Calibri" pitchFamily="34" charset="-122"/>
                 <a:cs typeface="Calibri" pitchFamily="34" charset="-120"/>
               </a:rPr>
-              <a:t>추론 지연</a:t>
+              <a:t>지연 (단일 스레드)</a:t>
             </a:r>
             <a:endParaRPr lang="en-US" sz="1100" dirty="0"/>
           </a:p>
@@ -3198,7 +3198,7 @@
                 <a:ea typeface="Calibri" pitchFamily="34" charset="-122"/>
                 <a:cs typeface="Calibri" pitchFamily="34" charset="-120"/>
               </a:rPr>
-              <a:t>판정 대기</a:t>
+              <a:t>C 채택</a:t>
             </a:r>
             <a:endParaRPr lang="en-US" sz="1000" dirty="0"/>
           </a:p>
@@ -3221,11 +3221,11 @@
             </a:avLst>
           </a:prstGeom>
           <a:solidFill>
-            <a:srgbClr val="D99A2B"/>
+            <a:srgbClr val="2E9E6B"/>
           </a:solidFill>
           <a:ln w="12700">
             <a:solidFill>
-              <a:srgbClr val="D99A2B"/>
+              <a:srgbClr val="2E9E6B"/>
             </a:solidFill>
             <a:prstDash val="solid"/>
           </a:ln>
@@ -3264,7 +3264,7 @@
                 <a:ea typeface="Calibri" pitchFamily="34" charset="-122"/>
                 <a:cs typeface="Calibri" pitchFamily="34" charset="-120"/>
               </a:rPr>
-              <a:t>진행중</a:t>
+              <a:t>완료</a:t>
             </a:r>
             <a:endParaRPr lang="en-US" sz="950" dirty="0"/>
           </a:p>
@@ -9553,7 +9553,7 @@
                 <a:ea typeface="Calibri" pitchFamily="34" charset="-122"/>
                 <a:cs typeface="Calibri" pitchFamily="34" charset="-120"/>
               </a:rPr>
-              <a:t>A 합격 → 전처리 불필요, A 확정      B·C만 합격 → 전처리 필요      전부 불합격 → Stage 2(DINOv2 증류) 근거 성립</a:t>
+              <a:t>판정 — 사전 등록 기준으로는 전원 불합격(정반사 축).  색 2축은 C가 완전 해결 → C 채택, 정반사는 독립 과제로 분리</a:t>
             </a:r>
             <a:endParaRPr lang="en-US" sz="1150" dirty="0"/>
           </a:p>
@@ -9592,7 +9592,7 @@
                 <a:ea typeface="Calibri" pitchFamily="34" charset="-122"/>
                 <a:cs typeface="Calibri" pitchFamily="34" charset="-120"/>
               </a:rPr>
-              <a:t>결과를 보기 전에 기준을 고정했다 — 사후 합리화 방지</a:t>
+              <a:t>C: 색바램 0.9974 · 황변 0.9977 · 정반사 0.9228 (미해결)   |   무섭동 0.9980, 단일 스레드 18.75 ms</a:t>
             </a:r>
             <a:endParaRPr lang="en-US" sz="1050" dirty="0"/>
           </a:p>
@@ -9844,7 +9844,7 @@
                 <a:ea typeface="Calibri" pitchFamily="34" charset="-122"/>
                 <a:cs typeface="Calibri" pitchFamily="34" charset="-120"/>
               </a:rPr>
-              <a:t>export 경로 · 벤치 · 해상도 확정을 모두 막고 있음</a:t>
+              <a:t>export 경로 · 벤치 · 정반사 대응 방식을 모두 막고 있음</a:t>
             </a:r>
             <a:endParaRPr lang="en-US" sz="1050" dirty="0"/>
           </a:p>
@@ -10425,7 +10425,7 @@
                 <a:ea typeface="Calibri" pitchFamily="34" charset="-122"/>
                 <a:cs typeface="Calibri" pitchFamily="34" charset="-120"/>
               </a:rPr>
-              <a:t>CableInspect-AD 확보</a:t>
+              <a:t>정반사 대응 (미해결)</a:t>
             </a:r>
             <a:endParaRPr lang="en-US" sz="1250" dirty="0"/>
           </a:p>
@@ -10464,7 +10464,7 @@
                 <a:ea typeface="Calibri" pitchFamily="34" charset="-122"/>
                 <a:cs typeface="Calibri" pitchFamily="34" charset="-120"/>
               </a:rPr>
-              <a:t>실측 현장 데이터 · 불량 2,639장(29배)</a:t>
+              <a:t>조명·편광 필터 우선 · 안 되면 Stage 2</a:t>
             </a:r>
             <a:endParaRPr lang="en-US" sz="1000" dirty="0"/>
           </a:p>
@@ -10594,7 +10594,7 @@
                 <a:ea typeface="Calibri" pitchFamily="34" charset="-122"/>
                 <a:cs typeface="Calibri" pitchFamily="34" charset="-120"/>
               </a:rPr>
-              <a:t>INT8 양자화 + ONNX export</a:t>
+              <a:t>CableInspect-AD 확보</a:t>
             </a:r>
             <a:endParaRPr lang="en-US" sz="1250" dirty="0"/>
           </a:p>
@@ -10633,7 +10633,7 @@
                 <a:ea typeface="Calibri" pitchFamily="34" charset="-122"/>
                 <a:cs typeface="Calibri" pitchFamily="34" charset="-120"/>
               </a:rPr>
-              <a:t>6.08 → 1.52 MB · 수치 동등성 검증</a:t>
+              <a:t>실측 현장 데이터 · 불량 2,639장(29배)</a:t>
             </a:r>
             <a:endParaRPr lang="en-US" sz="1000" dirty="0"/>
           </a:p>
@@ -10763,7 +10763,7 @@
                 <a:ea typeface="Calibri" pitchFamily="34" charset="-122"/>
                 <a:cs typeface="Calibri" pitchFamily="34" charset="-120"/>
               </a:rPr>
-              <a:t>타깃 하드웨어 벤치</a:t>
+              <a:t>INT8 양자화 + ONNX export</a:t>
             </a:r>
             <a:endParaRPr lang="en-US" sz="1250" dirty="0"/>
           </a:p>
@@ -10802,7 +10802,7 @@
                 <a:ea typeface="Calibri" pitchFamily="34" charset="-122"/>
                 <a:cs typeface="Calibri" pitchFamily="34" charset="-120"/>
               </a:rPr>
-              <a:t>열 스로틀링 포함 §9.3 프로토콜</a:t>
+              <a:t>6.08 → 1.52 MB · 수치 동등성 검증</a:t>
             </a:r>
             <a:endParaRPr lang="en-US" sz="1000" dirty="0"/>
           </a:p>
@@ -10932,7 +10932,7 @@
                 <a:ea typeface="Calibri" pitchFamily="34" charset="-122"/>
                 <a:cs typeface="Calibri" pitchFamily="34" charset="-120"/>
               </a:rPr>
-              <a:t>Track B (EfficientAD / LogiCo)</a:t>
+              <a:t>타깃 하드웨어 벤치</a:t>
             </a:r>
             <a:endParaRPr lang="en-US" sz="1250" dirty="0"/>
           </a:p>
@@ -10971,7 +10971,7 @@
                 <a:ea typeface="Calibri" pitchFamily="34" charset="-122"/>
                 <a:cs typeface="Calibri" pitchFamily="34" charset="-120"/>
               </a:rPr>
-              <a:t>GPU 확보 후 · 문헌 비교 가능</a:t>
+              <a:t>열 스로틀링 포함 §9.3 프로토콜</a:t>
             </a:r>
             <a:endParaRPr lang="en-US" sz="1000" dirty="0"/>
           </a:p>
